--- a/Clases/Inyeccion de SQL, SPs, Funciones/Inyeccion SL, SPs, Funciones.pptx
+++ b/Clases/Inyeccion de SQL, SPs, Funciones/Inyeccion SL, SPs, Funciones.pptx
@@ -12600,7 +12600,11 @@
               <a:defRPr sz="1600"/>
             </a:pPr>
             <a:r>
-              <a:t>DECLARE @usuario VARCHAR(50) = 'admin'</a:t>
+              <a:t>DECLARE </a:t>
+            </a:r>
+            <a:r>
+              <a:rPr dirty="0"/>
+              <a:t>@sql VARCHAR(MAX)</a:t>
             </a:r>
           </a:p>
           <a:p>
@@ -12608,29 +12612,40 @@
               <a:defRPr sz="1600"/>
             </a:pPr>
             <a:r>
-              <a:t>DECLARE @clave VARCHAR(50) = ''' OR 1=1 --'</a:t>
+              <a:rPr dirty="0"/>
+              <a:t>DECLARE @usuario VARCHAR(50) = '</a:t>
+            </a:r>
+            <a:r>
+              <a:rPr dirty="0" err="1"/>
+              <a:t>admin</a:t>
+            </a:r>
+            <a:r>
+              <a:rPr dirty="0"/>
+              <a:t>'</a:t>
             </a:r>
           </a:p>
           <a:p>
             <a:pPr>
               <a:defRPr sz="1600"/>
             </a:pPr>
-            <a:endParaRPr/>
+            <a:r>
+              <a:rPr dirty="0"/>
+              <a:t>DECLARE @clave VARCHAR(50) = ''' OR 1=1 --'</a:t>
+            </a:r>
           </a:p>
           <a:p>
             <a:pPr>
               <a:defRPr sz="1600"/>
             </a:pPr>
-            <a:r>
-              <a:t>SET @sql =</a:t>
-            </a:r>
+            <a:endParaRPr dirty="0"/>
           </a:p>
           <a:p>
             <a:pPr>
               <a:defRPr sz="1600"/>
             </a:pPr>
             <a:r>
-              <a:t>'SELECT * FROM Usuarios WHERE Usuario = ''' + @usuario +</a:t>
+              <a:rPr dirty="0"/>
+              <a:t>SET @sql =</a:t>
             </a:r>
           </a:p>
           <a:p>
@@ -12638,20 +12653,31 @@
               <a:defRPr sz="1600"/>
             </a:pPr>
             <a:r>
-              <a:t>''' AND Clave = ''' + @clave + ''''</a:t>
+              <a:rPr dirty="0"/>
+              <a:t>'SELECT * FROM Usuarios WHERE Usuario = ''' + @usuario +</a:t>
             </a:r>
           </a:p>
           <a:p>
             <a:pPr>
               <a:defRPr sz="1600"/>
             </a:pPr>
-            <a:endParaRPr/>
+            <a:r>
+              <a:rPr dirty="0"/>
+              <a:t>''' AND Clave = ''' + @clave + ''''</a:t>
+            </a:r>
           </a:p>
           <a:p>
             <a:pPr>
               <a:defRPr sz="1600"/>
             </a:pPr>
-            <a:r>
+            <a:endParaRPr dirty="0"/>
+          </a:p>
+          <a:p>
+            <a:pPr>
+              <a:defRPr sz="1600"/>
+            </a:pPr>
+            <a:r>
+              <a:rPr dirty="0"/>
               <a:t>EXEC(@sql)</a:t>
             </a:r>
           </a:p>
@@ -14199,6 +14225,15 @@
 </file>
 
 <file path=customXml/item2.xml><?xml version="1.0" encoding="utf-8"?>
+<?mso-contentType ?>
+<FormTemplates xmlns="http://schemas.microsoft.com/sharepoint/v3/contenttype/forms">
+  <Display>DocumentLibraryForm</Display>
+  <Edit>DocumentLibraryForm</Edit>
+  <New>DocumentLibraryForm</New>
+</FormTemplates>
+</file>
+
+<file path=customXml/item3.xml><?xml version="1.0" encoding="utf-8"?>
 <p:properties xmlns:p="http://schemas.microsoft.com/office/2006/metadata/properties" xmlns:xsi="http://www.w3.org/2001/XMLSchema-instance" xmlns:pc="http://schemas.microsoft.com/office/infopath/2007/PartnerControls">
   <documentManagement>
     <_ip_UnifiedCompliancePolicyUIAction xmlns="http://schemas.microsoft.com/sharepoint/v3" xsi:nil="true"/>
@@ -14216,15 +14251,6 @@
     <MediaServiceKeyPoints xmlns="71af3243-3dd4-4a8d-8c0d-dd76da1f02a5" xsi:nil="true"/>
   </documentManagement>
 </p:properties>
-</file>
-
-<file path=customXml/item3.xml><?xml version="1.0" encoding="utf-8"?>
-<?mso-contentType ?>
-<FormTemplates xmlns="http://schemas.microsoft.com/sharepoint/v3/contenttype/forms">
-  <Display>DocumentLibraryForm</Display>
-  <Edit>DocumentLibraryForm</Edit>
-  <New>DocumentLibraryForm</New>
-</FormTemplates>
 </file>
 
 <file path=customXml/itemProps1.xml><?xml version="1.0" encoding="utf-8"?>
@@ -14249,6 +14275,14 @@
 </file>
 
 <file path=customXml/itemProps2.xml><?xml version="1.0" encoding="utf-8"?>
+<ds:datastoreItem xmlns:ds="http://schemas.openxmlformats.org/officeDocument/2006/customXml" ds:itemID="{45A8381C-73EB-48EA-B45F-7B7C8C7DF409}">
+  <ds:schemaRefs>
+    <ds:schemaRef ds:uri="http://schemas.microsoft.com/sharepoint/v3/contenttype/forms"/>
+  </ds:schemaRefs>
+</ds:datastoreItem>
+</file>
+
+<file path=customXml/itemProps3.xml><?xml version="1.0" encoding="utf-8"?>
 <ds:datastoreItem xmlns:ds="http://schemas.openxmlformats.org/officeDocument/2006/customXml" ds:itemID="{61E98C35-9ECE-4425-BCBA-00E118C705CE}">
   <ds:schemaRefs>
     <ds:schemaRef ds:uri="http://schemas.microsoft.com/office/2006/metadata/properties"/>
@@ -14260,14 +14294,6 @@
 </ds:datastoreItem>
 </file>
 
-<file path=customXml/itemProps3.xml><?xml version="1.0" encoding="utf-8"?>
-<ds:datastoreItem xmlns:ds="http://schemas.openxmlformats.org/officeDocument/2006/customXml" ds:itemID="{45A8381C-73EB-48EA-B45F-7B7C8C7DF409}">
-  <ds:schemaRefs>
-    <ds:schemaRef ds:uri="http://schemas.microsoft.com/sharepoint/v3/contenttype/forms"/>
-  </ds:schemaRefs>
-</ds:datastoreItem>
-</file>
-
 <file path=docMetadata/LabelInfo.xml><?xml version="1.0" encoding="utf-8"?>
 <clbl:labelList xmlns:clbl="http://schemas.microsoft.com/office/2020/mipLabelMetadata"/>
 </file>
--- a/Clases/Inyeccion de SQL, SPs, Funciones/Inyeccion SL, SPs, Funciones.pptx
+++ b/Clases/Inyeccion de SQL, SPs, Funciones/Inyeccion SL, SPs, Funciones.pptx
@@ -11347,14 +11347,21 @@
               <a:defRPr sz="1600"/>
             </a:pPr>
             <a:r>
-              <a:t>CREATE PROCEDURE sp_BuscarProducto</a:t>
-            </a:r>
+              <a:rPr dirty="0"/>
+              <a:t>CREATE PROCEDURE </a:t>
+            </a:r>
+            <a:r>
+              <a:rPr dirty="0" err="1"/>
+              <a:t>sp_BuscarProducto</a:t>
+            </a:r>
+            <a:endParaRPr dirty="0"/>
           </a:p>
           <a:p>
             <a:pPr>
               <a:defRPr sz="1600"/>
             </a:pPr>
             <a:r>
+              <a:rPr dirty="0"/>
               <a:t>   @nombre VARCHAR(100)</a:t>
             </a:r>
           </a:p>
@@ -11363,6 +11370,7 @@
               <a:defRPr sz="1600"/>
             </a:pPr>
             <a:r>
+              <a:rPr dirty="0"/>
               <a:t>AS</a:t>
             </a:r>
           </a:p>
@@ -11371,6 +11379,7 @@
               <a:defRPr sz="1600"/>
             </a:pPr>
             <a:r>
+              <a:rPr dirty="0"/>
               <a:t>BEGIN</a:t>
             </a:r>
           </a:p>
@@ -11379,6 +11388,7 @@
               <a:defRPr sz="1600"/>
             </a:pPr>
             <a:r>
+              <a:rPr dirty="0"/>
               <a:t>   SELECT *</a:t>
             </a:r>
           </a:p>
@@ -11387,6 +11397,7 @@
               <a:defRPr sz="1600"/>
             </a:pPr>
             <a:r>
+              <a:rPr dirty="0"/>
               <a:t>   FROM Productos</a:t>
             </a:r>
           </a:p>
@@ -11395,6 +11406,7 @@
               <a:defRPr sz="1600"/>
             </a:pPr>
             <a:r>
+              <a:rPr dirty="0"/>
               <a:t>   WHERE Nombre LIKE '%' + @nombre + '%'</a:t>
             </a:r>
           </a:p>
@@ -11403,6 +11415,7 @@
               <a:defRPr sz="1600"/>
             </a:pPr>
             <a:r>
+              <a:rPr dirty="0"/>
               <a:t>END</a:t>
             </a:r>
           </a:p>
@@ -12600,11 +12613,8 @@
               <a:defRPr sz="1600"/>
             </a:pPr>
             <a:r>
-              <a:t>DECLARE </a:t>
-            </a:r>
-            <a:r>
               <a:rPr dirty="0"/>
-              <a:t>@sql VARCHAR(MAX)</a:t>
+              <a:t>DECLARE @sql VARCHAR(MAX)</a:t>
             </a:r>
           </a:p>
           <a:p>
